--- a/documentation/review/2nd review.pptx
+++ b/documentation/review/2nd review.pptx
@@ -295,7 +295,7 @@
             <a:fld id="{1D8BD707-D9CF-40AE-B4C6-C98DA3205C09}" type="datetimeFigureOut">
               <a:rPr lang="en-US" smtClean="0"/>
               <a:pPr/>
-              <a:t>3/5/2026</a:t>
+              <a:t>4/9/2026</a:t>
             </a:fld>
             <a:endParaRPr lang="en-US"/>
           </a:p>
@@ -497,7 +497,7 @@
             <a:fld id="{1D8BD707-D9CF-40AE-B4C6-C98DA3205C09}" type="datetimeFigureOut">
               <a:rPr lang="en-US" smtClean="0"/>
               <a:pPr/>
-              <a:t>3/5/2026</a:t>
+              <a:t>4/9/2026</a:t>
             </a:fld>
             <a:endParaRPr lang="en-US"/>
           </a:p>
@@ -709,7 +709,7 @@
             <a:fld id="{1D8BD707-D9CF-40AE-B4C6-C98DA3205C09}" type="datetimeFigureOut">
               <a:rPr lang="en-US" smtClean="0"/>
               <a:pPr/>
-              <a:t>3/5/2026</a:t>
+              <a:t>4/9/2026</a:t>
             </a:fld>
             <a:endParaRPr lang="en-US"/>
           </a:p>
@@ -911,7 +911,7 @@
             <a:fld id="{1D8BD707-D9CF-40AE-B4C6-C98DA3205C09}" type="datetimeFigureOut">
               <a:rPr lang="en-US" smtClean="0"/>
               <a:pPr/>
-              <a:t>3/5/2026</a:t>
+              <a:t>4/9/2026</a:t>
             </a:fld>
             <a:endParaRPr lang="en-US"/>
           </a:p>
@@ -1189,7 +1189,7 @@
             <a:fld id="{1D8BD707-D9CF-40AE-B4C6-C98DA3205C09}" type="datetimeFigureOut">
               <a:rPr lang="en-US" smtClean="0"/>
               <a:pPr/>
-              <a:t>3/5/2026</a:t>
+              <a:t>4/9/2026</a:t>
             </a:fld>
             <a:endParaRPr lang="en-US"/>
           </a:p>
@@ -1459,7 +1459,7 @@
             <a:fld id="{1D8BD707-D9CF-40AE-B4C6-C98DA3205C09}" type="datetimeFigureOut">
               <a:rPr lang="en-US" smtClean="0"/>
               <a:pPr/>
-              <a:t>3/5/2026</a:t>
+              <a:t>4/9/2026</a:t>
             </a:fld>
             <a:endParaRPr lang="en-US"/>
           </a:p>
@@ -1876,7 +1876,7 @@
             <a:fld id="{1D8BD707-D9CF-40AE-B4C6-C98DA3205C09}" type="datetimeFigureOut">
               <a:rPr lang="en-US" smtClean="0"/>
               <a:pPr/>
-              <a:t>3/5/2026</a:t>
+              <a:t>4/9/2026</a:t>
             </a:fld>
             <a:endParaRPr lang="en-US"/>
           </a:p>
@@ -2020,7 +2020,7 @@
             <a:fld id="{1D8BD707-D9CF-40AE-B4C6-C98DA3205C09}" type="datetimeFigureOut">
               <a:rPr lang="en-US" smtClean="0"/>
               <a:pPr/>
-              <a:t>3/5/2026</a:t>
+              <a:t>4/9/2026</a:t>
             </a:fld>
             <a:endParaRPr lang="en-US"/>
           </a:p>
@@ -2135,7 +2135,7 @@
             <a:fld id="{1D8BD707-D9CF-40AE-B4C6-C98DA3205C09}" type="datetimeFigureOut">
               <a:rPr lang="en-US" smtClean="0"/>
               <a:pPr/>
-              <a:t>3/5/2026</a:t>
+              <a:t>4/9/2026</a:t>
             </a:fld>
             <a:endParaRPr lang="en-US"/>
           </a:p>
@@ -2450,7 +2450,7 @@
             <a:fld id="{1D8BD707-D9CF-40AE-B4C6-C98DA3205C09}" type="datetimeFigureOut">
               <a:rPr lang="en-US" smtClean="0"/>
               <a:pPr/>
-              <a:t>3/5/2026</a:t>
+              <a:t>4/9/2026</a:t>
             </a:fld>
             <a:endParaRPr lang="en-US"/>
           </a:p>
@@ -2741,7 +2741,7 @@
             <a:fld id="{1D8BD707-D9CF-40AE-B4C6-C98DA3205C09}" type="datetimeFigureOut">
               <a:rPr lang="en-US" smtClean="0"/>
               <a:pPr/>
-              <a:t>3/5/2026</a:t>
+              <a:t>4/9/2026</a:t>
             </a:fld>
             <a:endParaRPr lang="en-US"/>
           </a:p>
@@ -2986,7 +2986,7 @@
             <a:fld id="{1D8BD707-D9CF-40AE-B4C6-C98DA3205C09}" type="datetimeFigureOut">
               <a:rPr lang="en-US" smtClean="0"/>
               <a:pPr/>
-              <a:t>3/5/2026</a:t>
+              <a:t>4/9/2026</a:t>
             </a:fld>
             <a:endParaRPr lang="en-US"/>
           </a:p>
@@ -3654,7 +3654,7 @@
               <a:rPr lang="en-IN" sz="6500" b="1" dirty="0">
                 <a:latin typeface="DM Sans Bold" panose="020B0604020202020204" charset="0"/>
               </a:rPr>
-              <a:t>Project Second Review</a:t>
+              <a:t>Project Final Review</a:t>
             </a:r>
             <a:endParaRPr lang="en-IN" sz="6500" dirty="0">
               <a:latin typeface="DM Sans Bold" panose="020B0604020202020204" charset="0"/>
@@ -3744,7 +3744,7 @@
               <a:rPr lang="en-IN" sz="3200" b="1" dirty="0">
                 <a:latin typeface="DM Sans Bold" panose="020B0604020202020204" charset="0"/>
               </a:rPr>
-              <a:t>DATE : 05 . 03 . 2026</a:t>
+              <a:t>DATE : 09.04. 2026</a:t>
             </a:r>
           </a:p>
         </p:txBody>
@@ -4359,7 +4359,7 @@
         </p:nvSpPr>
         <p:spPr>
           <a:xfrm>
-            <a:off x="1447800" y="5716285"/>
+            <a:off x="1447800" y="5782531"/>
             <a:ext cx="7162800" cy="2866169"/>
           </a:xfrm>
           <a:prstGeom prst="rect">
@@ -4416,7 +4416,7 @@
                 <a:cs typeface="Times New Roman" panose="02020603050405020304" pitchFamily="18" charset="0"/>
                 <a:sym typeface="DM Sans"/>
               </a:rPr>
-              <a:t>Inbarasu M	: 714222104021</a:t>
+              <a:t>Inbarasu M	: 714222104020</a:t>
             </a:r>
           </a:p>
           <a:p>
@@ -6155,10 +6155,10 @@
       </p:sp>
       <p:pic>
         <p:nvPicPr>
-          <p:cNvPr id="3" name="Picture 2">
-            <a:extLst>
-              <a:ext uri="{FF2B5EF4-FFF2-40B4-BE49-F238E27FC236}">
-                <a16:creationId xmlns:a16="http://schemas.microsoft.com/office/drawing/2014/main" id="{E7ED56D2-D8E8-8AAF-DB39-69B6B0DA35F6}"/>
+          <p:cNvPr id="4" name="Picture 3">
+            <a:extLst>
+              <a:ext uri="{FF2B5EF4-FFF2-40B4-BE49-F238E27FC236}">
+                <a16:creationId xmlns:a16="http://schemas.microsoft.com/office/drawing/2014/main" id="{F4FC3263-11E8-6488-6F3B-E1CB1BCF919E}"/>
               </a:ext>
             </a:extLst>
           </p:cNvPr>
@@ -6181,8 +6181,8 @@
         </p:blipFill>
         <p:spPr>
           <a:xfrm>
-            <a:off x="7467600" y="1895606"/>
-            <a:ext cx="3606419" cy="8034300"/>
+            <a:off x="14093247" y="2171697"/>
+            <a:ext cx="3070803" cy="6841067"/>
           </a:xfrm>
           <a:prstGeom prst="rect">
             <a:avLst/>
@@ -6191,10 +6191,10 @@
       </p:pic>
       <p:pic>
         <p:nvPicPr>
-          <p:cNvPr id="6" name="Picture 5">
-            <a:extLst>
-              <a:ext uri="{FF2B5EF4-FFF2-40B4-BE49-F238E27FC236}">
-                <a16:creationId xmlns:a16="http://schemas.microsoft.com/office/drawing/2014/main" id="{E449A29F-C17C-3B50-10C0-58571BED8D7F}"/>
+          <p:cNvPr id="8" name="Picture 7">
+            <a:extLst>
+              <a:ext uri="{FF2B5EF4-FFF2-40B4-BE49-F238E27FC236}">
+                <a16:creationId xmlns:a16="http://schemas.microsoft.com/office/drawing/2014/main" id="{B6880E74-B367-6FC4-500A-2381BD551DDA}"/>
               </a:ext>
             </a:extLst>
           </p:cNvPr>
@@ -6217,8 +6217,8 @@
         </p:blipFill>
         <p:spPr>
           <a:xfrm>
-            <a:off x="13335000" y="1895606"/>
-            <a:ext cx="3606419" cy="8034300"/>
+            <a:off x="9827274" y="2171698"/>
+            <a:ext cx="3070803" cy="6841067"/>
           </a:xfrm>
           <a:prstGeom prst="rect">
             <a:avLst/>
@@ -6227,10 +6227,10 @@
       </p:pic>
       <p:pic>
         <p:nvPicPr>
-          <p:cNvPr id="10" name="Picture 9">
-            <a:extLst>
-              <a:ext uri="{FF2B5EF4-FFF2-40B4-BE49-F238E27FC236}">
-                <a16:creationId xmlns:a16="http://schemas.microsoft.com/office/drawing/2014/main" id="{67646354-899E-5A27-6502-D20CCE964F60}"/>
+          <p:cNvPr id="11" name="Picture 10">
+            <a:extLst>
+              <a:ext uri="{FF2B5EF4-FFF2-40B4-BE49-F238E27FC236}">
+                <a16:creationId xmlns:a16="http://schemas.microsoft.com/office/drawing/2014/main" id="{25629F9F-93BF-4764-7DA2-16EF4288A1B0}"/>
               </a:ext>
             </a:extLst>
           </p:cNvPr>
@@ -6253,8 +6253,44 @@
         </p:blipFill>
         <p:spPr>
           <a:xfrm>
-            <a:off x="990600" y="1895606"/>
-            <a:ext cx="3606419" cy="8034300"/>
+            <a:off x="5334000" y="2171698"/>
+            <a:ext cx="3070803" cy="6841067"/>
+          </a:xfrm>
+          <a:prstGeom prst="rect">
+            <a:avLst/>
+          </a:prstGeom>
+        </p:spPr>
+      </p:pic>
+      <p:pic>
+        <p:nvPicPr>
+          <p:cNvPr id="13" name="Picture 12">
+            <a:extLst>
+              <a:ext uri="{FF2B5EF4-FFF2-40B4-BE49-F238E27FC236}">
+                <a16:creationId xmlns:a16="http://schemas.microsoft.com/office/drawing/2014/main" id="{A2B65ED2-9868-B3EB-E6C6-5F50143AE85C}"/>
+              </a:ext>
+            </a:extLst>
+          </p:cNvPr>
+          <p:cNvPicPr>
+            <a:picLocks noChangeAspect="1"/>
+          </p:cNvPicPr>
+          <p:nvPr/>
+        </p:nvPicPr>
+        <p:blipFill>
+          <a:blip r:embed="rId5">
+            <a:extLst>
+              <a:ext uri="{28A0092B-C50C-407E-A947-70E740481C1C}">
+                <a14:useLocalDpi xmlns:a14="http://schemas.microsoft.com/office/drawing/2010/main" val="0"/>
+              </a:ext>
+            </a:extLst>
+          </a:blip>
+          <a:stretch>
+            <a:fillRect/>
+          </a:stretch>
+        </p:blipFill>
+        <p:spPr>
+          <a:xfrm>
+            <a:off x="1143000" y="2171697"/>
+            <a:ext cx="3070803" cy="6841067"/>
           </a:xfrm>
           <a:prstGeom prst="rect">
             <a:avLst/>
